--- a/curso/pptx/S12.pptx
+++ b/curso/pptx/S12.pptx
@@ -6842,7 +6842,7 @@
                 </a:solidFill>
                 <a:latin typeface="Nunito Sans"/>
               </a:rPr>
-              <a:t>Antes de premisa: «porque», «ya que», «como»</a:t>
+              <a:t>前提前面的词：“因为”“既然”“由于”</a:t>
             </a:r>
           </a:p>
           <a:p>
@@ -6867,7 +6867,7 @@
                 </a:solidFill>
                 <a:latin typeface="Nunito Sans"/>
               </a:rPr>
-              <a:t>Antes de conclusión: «por tanto», «así que», «por eso»</a:t>
+              <a:t>结论前面的词：“所以”“因此”“因而”</a:t>
             </a:r>
           </a:p>
           <a:p>
@@ -6892,7 +6892,7 @@
                 </a:solidFill>
                 <a:latin typeface="Nunito Sans"/>
               </a:rPr>
-              <a:t>La conclusión no siempre va al final</a:t>
+              <a:t>结论不一定在最后</a:t>
             </a:r>
           </a:p>
         </p:txBody>
@@ -7044,7 +7044,7 @@
                 </a:solidFill>
                 <a:latin typeface="Nunito Sans"/>
               </a:rPr>
-              <a:t>1. Busca la conclusión</a:t>
+              <a:t>1. 找结论</a:t>
             </a:r>
           </a:p>
           <a:p>
@@ -7069,7 +7069,7 @@
                 </a:solidFill>
                 <a:latin typeface="Nunito Sans"/>
               </a:rPr>
-              <a:t>2. Busca las premisas</a:t>
+              <a:t>2. 找前提</a:t>
             </a:r>
           </a:p>
           <a:p>
@@ -7094,7 +7094,7 @@
                 </a:solidFill>
                 <a:latin typeface="Nunito Sans"/>
               </a:rPr>
-              <a:t>3. Quita lo que sobra</a:t>
+              <a:t>3. 去掉多余的部分</a:t>
             </a:r>
           </a:p>
           <a:p>
@@ -7119,7 +7119,7 @@
                 </a:solidFill>
                 <a:latin typeface="Nunito Sans"/>
               </a:rPr>
-              <a:t>4. Busca la </a:t>
+              <a:t>4. 找</a:t>
             </a:r>
             <a:r>
               <a:rPr sz="2800" b="1">
@@ -7128,7 +7128,7 @@
                 </a:solidFill>
                 <a:latin typeface="Nunito Sans"/>
               </a:rPr>
-              <a:t>premisa oculta</a:t>
+              <a:t>隐藏前提</a:t>
             </a:r>
             <a:r>
               <a:rPr sz="2800" b="0">
@@ -7137,7 +7137,7 @@
                 </a:solidFill>
                 <a:latin typeface="Nunito Sans"/>
               </a:rPr>
-              <a:t>: la que no se dice, pero hace falta</a:t>
+              <a:t>：没有说出来，但必须有的那个</a:t>
             </a:r>
           </a:p>
         </p:txBody>

--- a/curso/pptx/S12.pptx
+++ b/curso/pptx/S12.pptx
@@ -7797,7 +7797,7 @@
                           </a:solidFill>
                           <a:latin typeface="Nunito Sans"/>
                         </a:rPr>
-                        <a:t>所有二年级学生都有英语课；艾托是二年级学生……</a:t>
+                        <a:t>所有二年级学生都有英语课；一个男孩是二年级学生……</a:t>
                       </a:r>
                     </a:p>
                   </a:txBody>
